--- a/Material_de_Treino/DesenvolvimentoSeguro_tecnico.pptx
+++ b/Material_de_Treino/DesenvolvimentoSeguro_tecnico.pptx
@@ -29,22 +29,21 @@
     <p:sldId id="282" r:id="rId23"/>
     <p:sldId id="283" r:id="rId24"/>
     <p:sldId id="269" r:id="rId25"/>
-    <p:sldId id="284" r:id="rId26"/>
-    <p:sldId id="285" r:id="rId27"/>
-    <p:sldId id="286" r:id="rId28"/>
-    <p:sldId id="270" r:id="rId29"/>
-    <p:sldId id="287" r:id="rId30"/>
-    <p:sldId id="289" r:id="rId31"/>
-    <p:sldId id="271" r:id="rId32"/>
-    <p:sldId id="290" r:id="rId33"/>
-    <p:sldId id="291" r:id="rId34"/>
-    <p:sldId id="272" r:id="rId35"/>
-    <p:sldId id="292" r:id="rId36"/>
-    <p:sldId id="293" r:id="rId37"/>
-    <p:sldId id="273" r:id="rId38"/>
-    <p:sldId id="295" r:id="rId39"/>
-    <p:sldId id="294" r:id="rId40"/>
-    <p:sldId id="296" r:id="rId41"/>
+    <p:sldId id="285" r:id="rId26"/>
+    <p:sldId id="286" r:id="rId27"/>
+    <p:sldId id="270" r:id="rId28"/>
+    <p:sldId id="287" r:id="rId29"/>
+    <p:sldId id="289" r:id="rId30"/>
+    <p:sldId id="271" r:id="rId31"/>
+    <p:sldId id="290" r:id="rId32"/>
+    <p:sldId id="291" r:id="rId33"/>
+    <p:sldId id="272" r:id="rId34"/>
+    <p:sldId id="292" r:id="rId35"/>
+    <p:sldId id="293" r:id="rId36"/>
+    <p:sldId id="273" r:id="rId37"/>
+    <p:sldId id="295" r:id="rId38"/>
+    <p:sldId id="294" r:id="rId39"/>
+    <p:sldId id="296" r:id="rId40"/>
   </p:sldIdLst>
   <p:sldSz cx="12192000" cy="6858000"/>
   <p:notesSz cx="6858000" cy="9144000"/>
@@ -155,6 +154,7 @@
 <p1510:revInfo xmlns:a="http://schemas.openxmlformats.org/drawingml/2006/main" xmlns:r="http://schemas.openxmlformats.org/officeDocument/2006/relationships" xmlns:p1510="http://schemas.microsoft.com/office/powerpoint/2015/10/main">
   <p1510:revLst>
     <p1510:client id="{2DBB8C58-7F32-9A6A-A4CE-F287C69F8E41}" v="2" dt="2025-07-06T11:30:54.412"/>
+    <p1510:client id="{E76F1CF1-7F83-68B9-8D3E-10E93EEA16CD}" v="83" dt="2025-07-06T18:43:14.867"/>
   </p1510:revLst>
 </p1510:revInfo>
 </file>
@@ -1033,6 +1033,174 @@
       </pc:sldChg>
     </pc:docChg>
   </pc:docChgLst>
+  <pc:docChgLst>
+    <pc:chgData name="Raquel Dos Santos Silva" userId="S::1242205@isep.ipp.pt::8ae1d8f1-1968-441a-92f3-17e17a526773" providerId="AD" clId="Web-{E76F1CF1-7F83-68B9-8D3E-10E93EEA16CD}"/>
+    <pc:docChg chg="delSld modSld">
+      <pc:chgData name="Raquel Dos Santos Silva" userId="S::1242205@isep.ipp.pt::8ae1d8f1-1968-441a-92f3-17e17a526773" providerId="AD" clId="Web-{E76F1CF1-7F83-68B9-8D3E-10E93EEA16CD}" dt="2025-07-06T18:43:14.867" v="70" actId="20577"/>
+      <pc:docMkLst>
+        <pc:docMk/>
+      </pc:docMkLst>
+      <pc:sldChg chg="modSp">
+        <pc:chgData name="Raquel Dos Santos Silva" userId="S::1242205@isep.ipp.pt::8ae1d8f1-1968-441a-92f3-17e17a526773" providerId="AD" clId="Web-{E76F1CF1-7F83-68B9-8D3E-10E93EEA16CD}" dt="2025-07-06T18:32:34.518" v="11" actId="20577"/>
+        <pc:sldMkLst>
+          <pc:docMk/>
+          <pc:sldMk cId="1645466370" sldId="258"/>
+        </pc:sldMkLst>
+        <pc:spChg chg="mod">
+          <ac:chgData name="Raquel Dos Santos Silva" userId="S::1242205@isep.ipp.pt::8ae1d8f1-1968-441a-92f3-17e17a526773" providerId="AD" clId="Web-{E76F1CF1-7F83-68B9-8D3E-10E93EEA16CD}" dt="2025-07-06T18:31:17.809" v="3" actId="20577"/>
+          <ac:spMkLst>
+            <pc:docMk/>
+            <pc:sldMk cId="1645466370" sldId="258"/>
+            <ac:spMk id="2" creationId="{B065F458-B109-B85F-6F38-F402FBA99FE0}"/>
+          </ac:spMkLst>
+        </pc:spChg>
+        <pc:spChg chg="mod">
+          <ac:chgData name="Raquel Dos Santos Silva" userId="S::1242205@isep.ipp.pt::8ae1d8f1-1968-441a-92f3-17e17a526773" providerId="AD" clId="Web-{E76F1CF1-7F83-68B9-8D3E-10E93EEA16CD}" dt="2025-07-06T18:32:34.518" v="11" actId="20577"/>
+          <ac:spMkLst>
+            <pc:docMk/>
+            <pc:sldMk cId="1645466370" sldId="258"/>
+            <ac:spMk id="3" creationId="{09EB3053-3AEA-011E-D6E9-04668E15965B}"/>
+          </ac:spMkLst>
+        </pc:spChg>
+      </pc:sldChg>
+      <pc:sldChg chg="modSp">
+        <pc:chgData name="Raquel Dos Santos Silva" userId="S::1242205@isep.ipp.pt::8ae1d8f1-1968-441a-92f3-17e17a526773" providerId="AD" clId="Web-{E76F1CF1-7F83-68B9-8D3E-10E93EEA16CD}" dt="2025-07-06T18:32:01.516" v="6" actId="20577"/>
+        <pc:sldMkLst>
+          <pc:docMk/>
+          <pc:sldMk cId="4136124336" sldId="259"/>
+        </pc:sldMkLst>
+        <pc:spChg chg="mod">
+          <ac:chgData name="Raquel Dos Santos Silva" userId="S::1242205@isep.ipp.pt::8ae1d8f1-1968-441a-92f3-17e17a526773" providerId="AD" clId="Web-{E76F1CF1-7F83-68B9-8D3E-10E93EEA16CD}" dt="2025-07-06T18:32:01.516" v="6" actId="20577"/>
+          <ac:spMkLst>
+            <pc:docMk/>
+            <pc:sldMk cId="4136124336" sldId="259"/>
+            <ac:spMk id="2" creationId="{AB7A8910-BE08-11BE-FD1D-295614FF9442}"/>
+          </ac:spMkLst>
+        </pc:spChg>
+      </pc:sldChg>
+      <pc:sldChg chg="modSp">
+        <pc:chgData name="Raquel Dos Santos Silva" userId="S::1242205@isep.ipp.pt::8ae1d8f1-1968-441a-92f3-17e17a526773" providerId="AD" clId="Web-{E76F1CF1-7F83-68B9-8D3E-10E93EEA16CD}" dt="2025-07-06T18:42:50.594" v="66" actId="20577"/>
+        <pc:sldMkLst>
+          <pc:docMk/>
+          <pc:sldMk cId="21841460" sldId="260"/>
+        </pc:sldMkLst>
+        <pc:spChg chg="mod">
+          <ac:chgData name="Raquel Dos Santos Silva" userId="S::1242205@isep.ipp.pt::8ae1d8f1-1968-441a-92f3-17e17a526773" providerId="AD" clId="Web-{E76F1CF1-7F83-68B9-8D3E-10E93EEA16CD}" dt="2025-07-06T18:42:50.594" v="66" actId="20577"/>
+          <ac:spMkLst>
+            <pc:docMk/>
+            <pc:sldMk cId="21841460" sldId="260"/>
+            <ac:spMk id="2" creationId="{3B88794C-F1EB-AE2F-3511-7A28F8165A03}"/>
+          </ac:spMkLst>
+        </pc:spChg>
+      </pc:sldChg>
+      <pc:sldChg chg="modSp">
+        <pc:chgData name="Raquel Dos Santos Silva" userId="S::1242205@isep.ipp.pt::8ae1d8f1-1968-441a-92f3-17e17a526773" providerId="AD" clId="Web-{E76F1CF1-7F83-68B9-8D3E-10E93EEA16CD}" dt="2025-07-06T18:43:14.867" v="70" actId="20577"/>
+        <pc:sldMkLst>
+          <pc:docMk/>
+          <pc:sldMk cId="3394671002" sldId="262"/>
+        </pc:sldMkLst>
+        <pc:spChg chg="mod">
+          <ac:chgData name="Raquel Dos Santos Silva" userId="S::1242205@isep.ipp.pt::8ae1d8f1-1968-441a-92f3-17e17a526773" providerId="AD" clId="Web-{E76F1CF1-7F83-68B9-8D3E-10E93EEA16CD}" dt="2025-07-06T18:43:14.867" v="70" actId="20577"/>
+          <ac:spMkLst>
+            <pc:docMk/>
+            <pc:sldMk cId="3394671002" sldId="262"/>
+            <ac:spMk id="3" creationId="{97A8D615-B618-2A11-B46C-042660C0AC76}"/>
+          </ac:spMkLst>
+        </pc:spChg>
+      </pc:sldChg>
+      <pc:sldChg chg="modSp">
+        <pc:chgData name="Raquel Dos Santos Silva" userId="S::1242205@isep.ipp.pt::8ae1d8f1-1968-441a-92f3-17e17a526773" providerId="AD" clId="Web-{E76F1CF1-7F83-68B9-8D3E-10E93EEA16CD}" dt="2025-07-06T18:37:50.744" v="33" actId="20577"/>
+        <pc:sldMkLst>
+          <pc:docMk/>
+          <pc:sldMk cId="2196724713" sldId="282"/>
+        </pc:sldMkLst>
+        <pc:spChg chg="mod">
+          <ac:chgData name="Raquel Dos Santos Silva" userId="S::1242205@isep.ipp.pt::8ae1d8f1-1968-441a-92f3-17e17a526773" providerId="AD" clId="Web-{E76F1CF1-7F83-68B9-8D3E-10E93EEA16CD}" dt="2025-07-06T18:37:50.744" v="33" actId="20577"/>
+          <ac:spMkLst>
+            <pc:docMk/>
+            <pc:sldMk cId="2196724713" sldId="282"/>
+            <ac:spMk id="2" creationId="{1EB4A55E-1799-E280-F4DB-01AFB54D776B}"/>
+          </ac:spMkLst>
+        </pc:spChg>
+        <pc:spChg chg="mod">
+          <ac:chgData name="Raquel Dos Santos Silva" userId="S::1242205@isep.ipp.pt::8ae1d8f1-1968-441a-92f3-17e17a526773" providerId="AD" clId="Web-{E76F1CF1-7F83-68B9-8D3E-10E93EEA16CD}" dt="2025-07-06T18:37:42.978" v="31" actId="20577"/>
+          <ac:spMkLst>
+            <pc:docMk/>
+            <pc:sldMk cId="2196724713" sldId="282"/>
+            <ac:spMk id="3" creationId="{51642CA6-E855-4F55-336C-2C5C082F44E6}"/>
+          </ac:spMkLst>
+        </pc:spChg>
+      </pc:sldChg>
+      <pc:sldChg chg="modSp">
+        <pc:chgData name="Raquel Dos Santos Silva" userId="S::1242205@isep.ipp.pt::8ae1d8f1-1968-441a-92f3-17e17a526773" providerId="AD" clId="Web-{E76F1CF1-7F83-68B9-8D3E-10E93EEA16CD}" dt="2025-07-06T18:38:41.920" v="52" actId="20577"/>
+        <pc:sldMkLst>
+          <pc:docMk/>
+          <pc:sldMk cId="1008082368" sldId="283"/>
+        </pc:sldMkLst>
+        <pc:spChg chg="mod">
+          <ac:chgData name="Raquel Dos Santos Silva" userId="S::1242205@isep.ipp.pt::8ae1d8f1-1968-441a-92f3-17e17a526773" providerId="AD" clId="Web-{E76F1CF1-7F83-68B9-8D3E-10E93EEA16CD}" dt="2025-07-06T18:37:55.901" v="35" actId="20577"/>
+          <ac:spMkLst>
+            <pc:docMk/>
+            <pc:sldMk cId="1008082368" sldId="283"/>
+            <ac:spMk id="2" creationId="{FB55D478-9CBA-BB2E-DA5C-A4AE7A928D56}"/>
+          </ac:spMkLst>
+        </pc:spChg>
+        <pc:spChg chg="mod">
+          <ac:chgData name="Raquel Dos Santos Silva" userId="S::1242205@isep.ipp.pt::8ae1d8f1-1968-441a-92f3-17e17a526773" providerId="AD" clId="Web-{E76F1CF1-7F83-68B9-8D3E-10E93EEA16CD}" dt="2025-07-06T18:38:41.920" v="52" actId="20577"/>
+          <ac:spMkLst>
+            <pc:docMk/>
+            <pc:sldMk cId="1008082368" sldId="283"/>
+            <ac:spMk id="3" creationId="{D13619AF-F2F6-4274-FA9A-724892E358FB}"/>
+          </ac:spMkLst>
+        </pc:spChg>
+      </pc:sldChg>
+      <pc:sldChg chg="del">
+        <pc:chgData name="Raquel Dos Santos Silva" userId="S::1242205@isep.ipp.pt::8ae1d8f1-1968-441a-92f3-17e17a526773" providerId="AD" clId="Web-{E76F1CF1-7F83-68B9-8D3E-10E93EEA16CD}" dt="2025-07-06T18:39:33.486" v="53"/>
+        <pc:sldMkLst>
+          <pc:docMk/>
+          <pc:sldMk cId="1288950443" sldId="284"/>
+        </pc:sldMkLst>
+      </pc:sldChg>
+      <pc:sldChg chg="modSp">
+        <pc:chgData name="Raquel Dos Santos Silva" userId="S::1242205@isep.ipp.pt::8ae1d8f1-1968-441a-92f3-17e17a526773" providerId="AD" clId="Web-{E76F1CF1-7F83-68B9-8D3E-10E93EEA16CD}" dt="2025-07-06T18:39:52.800" v="55" actId="20577"/>
+        <pc:sldMkLst>
+          <pc:docMk/>
+          <pc:sldMk cId="106531504" sldId="285"/>
+        </pc:sldMkLst>
+        <pc:spChg chg="mod">
+          <ac:chgData name="Raquel Dos Santos Silva" userId="S::1242205@isep.ipp.pt::8ae1d8f1-1968-441a-92f3-17e17a526773" providerId="AD" clId="Web-{E76F1CF1-7F83-68B9-8D3E-10E93EEA16CD}" dt="2025-07-06T18:39:52.800" v="55" actId="20577"/>
+          <ac:spMkLst>
+            <pc:docMk/>
+            <pc:sldMk cId="106531504" sldId="285"/>
+            <ac:spMk id="2" creationId="{22911B85-4D5C-9A0F-1912-973305360DB9}"/>
+          </ac:spMkLst>
+        </pc:spChg>
+      </pc:sldChg>
+      <pc:sldChg chg="modSp">
+        <pc:chgData name="Raquel Dos Santos Silva" userId="S::1242205@isep.ipp.pt::8ae1d8f1-1968-441a-92f3-17e17a526773" providerId="AD" clId="Web-{E76F1CF1-7F83-68B9-8D3E-10E93EEA16CD}" dt="2025-07-06T18:40:58.852" v="64" actId="20577"/>
+        <pc:sldMkLst>
+          <pc:docMk/>
+          <pc:sldMk cId="4288333077" sldId="286"/>
+        </pc:sldMkLst>
+        <pc:spChg chg="mod">
+          <ac:chgData name="Raquel Dos Santos Silva" userId="S::1242205@isep.ipp.pt::8ae1d8f1-1968-441a-92f3-17e17a526773" providerId="AD" clId="Web-{E76F1CF1-7F83-68B9-8D3E-10E93EEA16CD}" dt="2025-07-06T18:39:56.691" v="58" actId="20577"/>
+          <ac:spMkLst>
+            <pc:docMk/>
+            <pc:sldMk cId="4288333077" sldId="286"/>
+            <ac:spMk id="2" creationId="{BA0DED6D-59AD-6AE7-1C24-55A62D78C4EB}"/>
+          </ac:spMkLst>
+        </pc:spChg>
+        <pc:spChg chg="mod">
+          <ac:chgData name="Raquel Dos Santos Silva" userId="S::1242205@isep.ipp.pt::8ae1d8f1-1968-441a-92f3-17e17a526773" providerId="AD" clId="Web-{E76F1CF1-7F83-68B9-8D3E-10E93EEA16CD}" dt="2025-07-06T18:40:58.852" v="64" actId="20577"/>
+          <ac:spMkLst>
+            <pc:docMk/>
+            <pc:sldMk cId="4288333077" sldId="286"/>
+            <ac:spMk id="3" creationId="{74AB3661-3C10-F73A-0B58-CE5832EDEC01}"/>
+          </ac:spMkLst>
+        </pc:spChg>
+      </pc:sldChg>
+    </pc:docChg>
+  </pc:docChgLst>
 </pc:chgInfo>
 </file>
 
@@ -7810,7 +7978,7 @@
                 <a:ea typeface="+mj-lt"/>
                 <a:cs typeface="+mj-lt"/>
               </a:rPr>
-              <a:t>Cenario</a:t>
+              <a:t>Cenário</a:t>
             </a:r>
             <a:r>
               <a:rPr lang="en-US" dirty="0">
@@ -7847,146 +8015,30 @@
           <a:lstStyle/>
           <a:p>
             <a:r>
-              <a:rPr lang="en-US" dirty="0"/>
-              <a:t>Uma </a:t>
-            </a:r>
-            <a:r>
-              <a:rPr lang="en-US" dirty="0" err="1"/>
-              <a:t>empresa</a:t>
-            </a:r>
-            <a:r>
-              <a:rPr lang="en-US" dirty="0"/>
-              <a:t> </a:t>
-            </a:r>
-            <a:r>
-              <a:rPr lang="en-US" dirty="0" err="1"/>
-              <a:t>utiliza</a:t>
-            </a:r>
-            <a:r>
-              <a:rPr lang="en-US" dirty="0"/>
-              <a:t> </a:t>
-            </a:r>
-            <a:r>
-              <a:rPr lang="en-US" dirty="0" err="1"/>
-              <a:t>configuracoes</a:t>
-            </a:r>
-            <a:r>
-              <a:rPr lang="en-US" dirty="0"/>
-              <a:t>/</a:t>
-            </a:r>
-            <a:r>
-              <a:rPr lang="en-US" dirty="0" err="1"/>
-              <a:t>credenciais</a:t>
-            </a:r>
-            <a:r>
-              <a:rPr lang="en-US" dirty="0"/>
-              <a:t> </a:t>
-            </a:r>
-            <a:r>
-              <a:rPr lang="en-US" dirty="0" err="1"/>
-              <a:t>padrao</a:t>
-            </a:r>
-            <a:r>
-              <a:rPr lang="en-US" dirty="0"/>
-              <a:t> de </a:t>
-            </a:r>
-            <a:r>
-              <a:rPr lang="en-US" dirty="0" err="1"/>
-              <a:t>uma</a:t>
-            </a:r>
-            <a:r>
-              <a:rPr lang="en-US" dirty="0"/>
-              <a:t> </a:t>
-            </a:r>
-            <a:r>
-              <a:rPr lang="en-US" dirty="0" err="1"/>
-              <a:t>aplicacao</a:t>
-            </a:r>
-            <a:r>
-              <a:rPr lang="en-US" dirty="0"/>
-              <a:t> (</a:t>
-            </a:r>
-            <a:r>
-              <a:rPr lang="en-US" dirty="0" err="1"/>
-              <a:t>exemplo</a:t>
-            </a:r>
-            <a:r>
-              <a:rPr lang="en-US" dirty="0"/>
-              <a:t>: Login – admin, Senha - Admin)</a:t>
-            </a:r>
-          </a:p>
-          <a:p>
-            <a:r>
-              <a:rPr lang="en-US" dirty="0"/>
-              <a:t>O </a:t>
-            </a:r>
-            <a:r>
-              <a:rPr lang="en-US" dirty="0" err="1"/>
-              <a:t>servidor</a:t>
-            </a:r>
-            <a:r>
-              <a:rPr lang="en-US" dirty="0"/>
-              <a:t> </a:t>
-            </a:r>
-            <a:r>
-              <a:rPr lang="en-US" dirty="0" err="1"/>
-              <a:t>apache</a:t>
-            </a:r>
-            <a:r>
-              <a:rPr lang="en-US" dirty="0"/>
-              <a:t> </a:t>
-            </a:r>
-            <a:r>
-              <a:rPr lang="en-US" dirty="0" err="1"/>
-              <a:t>esta</a:t>
-            </a:r>
-            <a:r>
-              <a:rPr lang="en-US" dirty="0"/>
-              <a:t> </a:t>
-            </a:r>
-            <a:r>
-              <a:rPr lang="en-US" dirty="0" err="1"/>
-              <a:t>configurado</a:t>
-            </a:r>
-            <a:r>
-              <a:rPr lang="en-US" dirty="0"/>
-              <a:t> de </a:t>
-            </a:r>
-            <a:r>
-              <a:rPr lang="en-US" dirty="0" err="1"/>
-              <a:t>maneiroa</a:t>
-            </a:r>
-            <a:r>
-              <a:rPr lang="en-US" dirty="0"/>
-              <a:t> </a:t>
-            </a:r>
-            <a:r>
-              <a:rPr lang="en-US" dirty="0" err="1"/>
-              <a:t>padrao</a:t>
-            </a:r>
-            <a:r>
-              <a:rPr lang="en-US" dirty="0"/>
-              <a:t>, </a:t>
-            </a:r>
-            <a:r>
-              <a:rPr lang="en-US" dirty="0" err="1"/>
-              <a:t>possibilitando</a:t>
-            </a:r>
-            <a:r>
-              <a:rPr lang="en-US" dirty="0"/>
-              <a:t> a </a:t>
-            </a:r>
-            <a:r>
-              <a:rPr lang="en-US" dirty="0" err="1"/>
-              <a:t>listagem</a:t>
-            </a:r>
-            <a:r>
-              <a:rPr lang="en-US" dirty="0"/>
-              <a:t> de </a:t>
-            </a:r>
-            <a:r>
-              <a:rPr lang="en-US" dirty="0" err="1"/>
-              <a:t>diretorios</a:t>
+              <a:rPr lang="pt-PT" dirty="0"/>
+              <a:t>Uma empresa utiliza configurações/credenciais padrão de uma aplicação (exemplo: Login – </a:t>
+            </a:r>
+            <a:r>
+              <a:rPr lang="pt-PT" dirty="0" err="1"/>
+              <a:t>admin</a:t>
+            </a:r>
+            <a:r>
+              <a:rPr lang="pt-PT" dirty="0"/>
+              <a:t>, Senha - </a:t>
+            </a:r>
+            <a:r>
+              <a:rPr lang="pt-PT" dirty="0" err="1"/>
+              <a:t>Admin</a:t>
+            </a:r>
+            <a:r>
+              <a:rPr lang="pt-PT" dirty="0"/>
+              <a:t>)</a:t>
+            </a:r>
+          </a:p>
+          <a:p>
+            <a:r>
+              <a:rPr lang="pt-PT" dirty="0"/>
+              <a:t>O servidor apache esta configurado de maneira padrão, possibilitando a listagem de diretórios</a:t>
             </a:r>
           </a:p>
         </p:txBody>
@@ -8074,7 +8126,7 @@
                 <a:ea typeface="+mj-lt"/>
                 <a:cs typeface="+mj-lt"/>
               </a:rPr>
-              <a:t>Cenario</a:t>
+              <a:t>Cenário</a:t>
             </a:r>
             <a:r>
               <a:rPr lang="en-US" dirty="0">
@@ -8115,7 +8167,7 @@
             </a:pPr>
             <a:r>
               <a:rPr lang="en-US" dirty="0" err="1"/>
-              <a:t>Solucao</a:t>
+              <a:t>Solução</a:t>
             </a:r>
           </a:p>
           <a:p>
@@ -8159,7 +8211,7 @@
             </a:r>
             <a:r>
               <a:rPr lang="en-US" dirty="0" err="1"/>
-              <a:t>configuracao</a:t>
+              <a:t>configuração</a:t>
             </a:r>
             <a:r>
               <a:rPr lang="en-US" dirty="0"/>
@@ -8175,7 +8227,7 @@
             </a:r>
             <a:r>
               <a:rPr lang="en-US" dirty="0" err="1"/>
-              <a:t>aplicacoes</a:t>
+              <a:t>aplicações</a:t>
             </a:r>
           </a:p>
           <a:p>
@@ -8197,7 +8249,7 @@
             </a:r>
             <a:r>
               <a:rPr lang="en-US" dirty="0" err="1"/>
-              <a:t>verificacao</a:t>
+              <a:t>verificação</a:t>
             </a:r>
             <a:r>
               <a:rPr lang="en-US" dirty="0"/>
@@ -8215,6 +8267,7 @@
               <a:rPr lang="en-US" dirty="0" err="1"/>
               <a:t>ativos</a:t>
             </a:r>
+            <a:endParaRPr lang="en-US" dirty="0"/>
           </a:p>
         </p:txBody>
       </p:sp>
@@ -8629,402 +8682,6 @@
         <p:cNvPr id="1" name="">
           <a:extLst>
             <a:ext uri="{FF2B5EF4-FFF2-40B4-BE49-F238E27FC236}">
-              <a16:creationId xmlns:a16="http://schemas.microsoft.com/office/drawing/2014/main" id="{2966CFE8-98FA-C567-1692-61BCCF4FB8D8}"/>
-            </a:ext>
-          </a:extLst>
-        </p:cNvPr>
-        <p:cNvGrpSpPr/>
-        <p:nvPr/>
-      </p:nvGrpSpPr>
-      <p:grpSpPr>
-        <a:xfrm>
-          <a:off x="0" y="0"/>
-          <a:ext cx="0" cy="0"/>
-          <a:chOff x="0" y="0"/>
-          <a:chExt cx="0" cy="0"/>
-        </a:xfrm>
-      </p:grpSpPr>
-      <p:sp>
-        <p:nvSpPr>
-          <p:cNvPr id="2" name="Title 1">
-            <a:extLst>
-              <a:ext uri="{FF2B5EF4-FFF2-40B4-BE49-F238E27FC236}">
-                <a16:creationId xmlns:a16="http://schemas.microsoft.com/office/drawing/2014/main" id="{37424659-B94C-EE83-8419-5947FFCEBF17}"/>
-              </a:ext>
-            </a:extLst>
-          </p:cNvPr>
-          <p:cNvSpPr>
-            <a:spLocks noGrp="1"/>
-          </p:cNvSpPr>
-          <p:nvPr>
-            <p:ph type="title"/>
-          </p:nvPr>
-        </p:nvSpPr>
-        <p:spPr/>
-        <p:txBody>
-          <a:bodyPr/>
-          <a:lstStyle/>
-          <a:p>
-            <a:r>
-              <a:rPr lang="en-US" dirty="0">
-                <a:ea typeface="+mj-lt"/>
-                <a:cs typeface="+mj-lt"/>
-              </a:rPr>
-              <a:t>A06:2021 Vulnerable and Outdated Components</a:t>
-            </a:r>
-            <a:endParaRPr lang="en-US" dirty="0"/>
-          </a:p>
-        </p:txBody>
-      </p:sp>
-      <p:sp>
-        <p:nvSpPr>
-          <p:cNvPr id="3" name="Content Placeholder 2">
-            <a:extLst>
-              <a:ext uri="{FF2B5EF4-FFF2-40B4-BE49-F238E27FC236}">
-                <a16:creationId xmlns:a16="http://schemas.microsoft.com/office/drawing/2014/main" id="{0E285A82-6D88-10DB-C377-20AFC648C6B4}"/>
-              </a:ext>
-            </a:extLst>
-          </p:cNvPr>
-          <p:cNvSpPr>
-            <a:spLocks noGrp="1"/>
-          </p:cNvSpPr>
-          <p:nvPr>
-            <p:ph idx="1"/>
-          </p:nvPr>
-        </p:nvSpPr>
-        <p:spPr/>
-        <p:txBody>
-          <a:bodyPr vert="horz" lIns="91440" tIns="45720" rIns="91440" bIns="45720" rtlCol="0" anchor="t">
-            <a:normAutofit/>
-          </a:bodyPr>
-          <a:lstStyle/>
-          <a:p>
-            <a:r>
-              <a:rPr lang="en-US" dirty="0">
-                <a:ea typeface="+mn-lt"/>
-                <a:cs typeface="+mn-lt"/>
-              </a:rPr>
-              <a:t>Componentes </a:t>
-            </a:r>
-            <a:r>
-              <a:rPr lang="en-US" dirty="0" err="1">
-                <a:ea typeface="+mn-lt"/>
-                <a:cs typeface="+mn-lt"/>
-              </a:rPr>
-              <a:t>vulneráveis</a:t>
-            </a:r>
-            <a:r>
-              <a:rPr lang="en-US" dirty="0">
-                <a:ea typeface="+mn-lt"/>
-                <a:cs typeface="+mn-lt"/>
-              </a:rPr>
-              <a:t> e </a:t>
-            </a:r>
-            <a:r>
-              <a:rPr lang="en-US" dirty="0" err="1">
-                <a:ea typeface="+mn-lt"/>
-                <a:cs typeface="+mn-lt"/>
-              </a:rPr>
-              <a:t>desatualizados</a:t>
-            </a:r>
-            <a:r>
-              <a:rPr lang="en-US" dirty="0">
-                <a:ea typeface="+mn-lt"/>
-                <a:cs typeface="+mn-lt"/>
-              </a:rPr>
-              <a:t> </a:t>
-            </a:r>
-            <a:r>
-              <a:rPr lang="en-US" dirty="0" err="1">
-                <a:ea typeface="+mn-lt"/>
-                <a:cs typeface="+mn-lt"/>
-              </a:rPr>
-              <a:t>incluem</a:t>
-            </a:r>
-            <a:r>
-              <a:rPr lang="en-US" dirty="0">
-                <a:ea typeface="+mn-lt"/>
-                <a:cs typeface="+mn-lt"/>
-              </a:rPr>
-              <a:t> </a:t>
-            </a:r>
-            <a:r>
-              <a:rPr lang="en-US" dirty="0" err="1">
-                <a:ea typeface="+mn-lt"/>
-                <a:cs typeface="+mn-lt"/>
-              </a:rPr>
-              <a:t>bibliotecas</a:t>
-            </a:r>
-            <a:r>
-              <a:rPr lang="en-US" dirty="0">
-                <a:ea typeface="+mn-lt"/>
-                <a:cs typeface="+mn-lt"/>
-              </a:rPr>
-              <a:t>, frameworks e outros </a:t>
-            </a:r>
-            <a:r>
-              <a:rPr lang="en-US" dirty="0" err="1">
-                <a:ea typeface="+mn-lt"/>
-                <a:cs typeface="+mn-lt"/>
-              </a:rPr>
-              <a:t>módulos</a:t>
-            </a:r>
-            <a:r>
-              <a:rPr lang="en-US" dirty="0">
-                <a:ea typeface="+mn-lt"/>
-                <a:cs typeface="+mn-lt"/>
-              </a:rPr>
-              <a:t> de software que </a:t>
-            </a:r>
-            <a:r>
-              <a:rPr lang="en-US" dirty="0" err="1">
-                <a:ea typeface="+mn-lt"/>
-                <a:cs typeface="+mn-lt"/>
-              </a:rPr>
-              <a:t>têm</a:t>
-            </a:r>
-            <a:r>
-              <a:rPr lang="en-US" dirty="0">
-                <a:ea typeface="+mn-lt"/>
-                <a:cs typeface="+mn-lt"/>
-              </a:rPr>
-              <a:t> </a:t>
-            </a:r>
-            <a:r>
-              <a:rPr lang="en-US" dirty="0" err="1">
-                <a:ea typeface="+mn-lt"/>
-                <a:cs typeface="+mn-lt"/>
-              </a:rPr>
-              <a:t>vulnerabilidades</a:t>
-            </a:r>
-            <a:r>
-              <a:rPr lang="en-US" dirty="0">
-                <a:ea typeface="+mn-lt"/>
-                <a:cs typeface="+mn-lt"/>
-              </a:rPr>
-              <a:t> </a:t>
-            </a:r>
-            <a:r>
-              <a:rPr lang="en-US" dirty="0" err="1">
-                <a:ea typeface="+mn-lt"/>
-                <a:cs typeface="+mn-lt"/>
-              </a:rPr>
-              <a:t>conhecidas</a:t>
-            </a:r>
-            <a:r>
-              <a:rPr lang="en-US" dirty="0">
-                <a:ea typeface="+mn-lt"/>
-                <a:cs typeface="+mn-lt"/>
-              </a:rPr>
-              <a:t>. A </a:t>
-            </a:r>
-            <a:r>
-              <a:rPr lang="en-US" dirty="0" err="1">
-                <a:ea typeface="+mn-lt"/>
-                <a:cs typeface="+mn-lt"/>
-              </a:rPr>
-              <a:t>exploração</a:t>
-            </a:r>
-            <a:r>
-              <a:rPr lang="en-US" dirty="0">
-                <a:ea typeface="+mn-lt"/>
-                <a:cs typeface="+mn-lt"/>
-              </a:rPr>
-              <a:t> de tais </a:t>
-            </a:r>
-            <a:r>
-              <a:rPr lang="en-US" dirty="0" err="1">
-                <a:ea typeface="+mn-lt"/>
-                <a:cs typeface="+mn-lt"/>
-              </a:rPr>
-              <a:t>vulnerabilidades</a:t>
-            </a:r>
-            <a:r>
-              <a:rPr lang="en-US" dirty="0">
-                <a:ea typeface="+mn-lt"/>
-                <a:cs typeface="+mn-lt"/>
-              </a:rPr>
-              <a:t> </a:t>
-            </a:r>
-            <a:r>
-              <a:rPr lang="en-US" dirty="0" err="1">
-                <a:ea typeface="+mn-lt"/>
-                <a:cs typeface="+mn-lt"/>
-              </a:rPr>
-              <a:t>pode</a:t>
-            </a:r>
-            <a:r>
-              <a:rPr lang="en-US" dirty="0">
-                <a:ea typeface="+mn-lt"/>
-                <a:cs typeface="+mn-lt"/>
-              </a:rPr>
-              <a:t> </a:t>
-            </a:r>
-            <a:r>
-              <a:rPr lang="en-US" dirty="0" err="1">
-                <a:ea typeface="+mn-lt"/>
-                <a:cs typeface="+mn-lt"/>
-              </a:rPr>
-              <a:t>resultar</a:t>
-            </a:r>
-            <a:r>
-              <a:rPr lang="en-US" dirty="0">
-                <a:ea typeface="+mn-lt"/>
-                <a:cs typeface="+mn-lt"/>
-              </a:rPr>
-              <a:t> </a:t>
-            </a:r>
-            <a:r>
-              <a:rPr lang="en-US" dirty="0" err="1">
-                <a:ea typeface="+mn-lt"/>
-                <a:cs typeface="+mn-lt"/>
-              </a:rPr>
-              <a:t>em</a:t>
-            </a:r>
-            <a:r>
-              <a:rPr lang="en-US" dirty="0">
-                <a:ea typeface="+mn-lt"/>
-                <a:cs typeface="+mn-lt"/>
-              </a:rPr>
-              <a:t> </a:t>
-            </a:r>
-            <a:r>
-              <a:rPr lang="en-US" dirty="0" err="1">
-                <a:ea typeface="+mn-lt"/>
-                <a:cs typeface="+mn-lt"/>
-              </a:rPr>
-              <a:t>perda</a:t>
-            </a:r>
-            <a:r>
-              <a:rPr lang="en-US" dirty="0">
-                <a:ea typeface="+mn-lt"/>
-                <a:cs typeface="+mn-lt"/>
-              </a:rPr>
-              <a:t> de dados, </a:t>
-            </a:r>
-            <a:r>
-              <a:rPr lang="en-US" dirty="0" err="1">
-                <a:ea typeface="+mn-lt"/>
-                <a:cs typeface="+mn-lt"/>
-              </a:rPr>
-              <a:t>comprometimento</a:t>
-            </a:r>
-            <a:r>
-              <a:rPr lang="en-US" dirty="0">
-                <a:ea typeface="+mn-lt"/>
-                <a:cs typeface="+mn-lt"/>
-              </a:rPr>
-              <a:t> do </a:t>
-            </a:r>
-            <a:r>
-              <a:rPr lang="en-US" dirty="0" err="1">
-                <a:ea typeface="+mn-lt"/>
-                <a:cs typeface="+mn-lt"/>
-              </a:rPr>
-              <a:t>servidor</a:t>
-            </a:r>
-            <a:r>
-              <a:rPr lang="en-US" dirty="0">
-                <a:ea typeface="+mn-lt"/>
-                <a:cs typeface="+mn-lt"/>
-              </a:rPr>
-              <a:t> </a:t>
-            </a:r>
-            <a:r>
-              <a:rPr lang="en-US" dirty="0" err="1">
-                <a:ea typeface="+mn-lt"/>
-                <a:cs typeface="+mn-lt"/>
-              </a:rPr>
-              <a:t>ou</a:t>
-            </a:r>
-            <a:r>
-              <a:rPr lang="en-US" dirty="0">
-                <a:ea typeface="+mn-lt"/>
-                <a:cs typeface="+mn-lt"/>
-              </a:rPr>
-              <a:t> </a:t>
-            </a:r>
-            <a:r>
-              <a:rPr lang="en-US" dirty="0" err="1">
-                <a:ea typeface="+mn-lt"/>
-                <a:cs typeface="+mn-lt"/>
-              </a:rPr>
-              <a:t>até</a:t>
-            </a:r>
-            <a:r>
-              <a:rPr lang="en-US" dirty="0">
-                <a:ea typeface="+mn-lt"/>
-                <a:cs typeface="+mn-lt"/>
-              </a:rPr>
-              <a:t> </a:t>
-            </a:r>
-            <a:r>
-              <a:rPr lang="en-US" dirty="0" err="1">
-                <a:ea typeface="+mn-lt"/>
-                <a:cs typeface="+mn-lt"/>
-              </a:rPr>
-              <a:t>mesmo</a:t>
-            </a:r>
-            <a:r>
-              <a:rPr lang="en-US" dirty="0">
-                <a:ea typeface="+mn-lt"/>
-                <a:cs typeface="+mn-lt"/>
-              </a:rPr>
-              <a:t> </a:t>
-            </a:r>
-            <a:r>
-              <a:rPr lang="en-US" dirty="0" err="1">
-                <a:ea typeface="+mn-lt"/>
-                <a:cs typeface="+mn-lt"/>
-              </a:rPr>
-              <a:t>controle</a:t>
-            </a:r>
-            <a:r>
-              <a:rPr lang="en-US" dirty="0">
-                <a:ea typeface="+mn-lt"/>
-                <a:cs typeface="+mn-lt"/>
-              </a:rPr>
-              <a:t> total do </a:t>
-            </a:r>
-            <a:r>
-              <a:rPr lang="en-US" dirty="0" err="1">
-                <a:ea typeface="+mn-lt"/>
-                <a:cs typeface="+mn-lt"/>
-              </a:rPr>
-              <a:t>sistema</a:t>
-            </a:r>
-            <a:r>
-              <a:rPr lang="en-US" dirty="0">
-                <a:ea typeface="+mn-lt"/>
-                <a:cs typeface="+mn-lt"/>
-              </a:rPr>
-              <a:t>.</a:t>
-            </a:r>
-            <a:endParaRPr lang="en-US" dirty="0"/>
-          </a:p>
-        </p:txBody>
-      </p:sp>
-    </p:spTree>
-    <p:extLst>
-      <p:ext uri="{BB962C8B-B14F-4D97-AF65-F5344CB8AC3E}">
-        <p14:creationId xmlns:p14="http://schemas.microsoft.com/office/powerpoint/2010/main" val="1288950443"/>
-      </p:ext>
-    </p:extLst>
-  </p:cSld>
-  <p:clrMapOvr>
-    <a:masterClrMapping/>
-  </p:clrMapOvr>
-</p:sld>
-</file>
-
-<file path=ppt/slides/slide26.xml><?xml version="1.0" encoding="utf-8"?>
-<p:sld xmlns:a="http://schemas.openxmlformats.org/drawingml/2006/main" xmlns:r="http://schemas.openxmlformats.org/officeDocument/2006/relationships" xmlns:p="http://schemas.openxmlformats.org/presentationml/2006/main">
-  <p:cSld>
-    <p:spTree>
-      <p:nvGrpSpPr>
-        <p:cNvPr id="1" name="">
-          <a:extLst>
-            <a:ext uri="{FF2B5EF4-FFF2-40B4-BE49-F238E27FC236}">
               <a16:creationId xmlns:a16="http://schemas.microsoft.com/office/drawing/2014/main" id="{2F068BD7-00C0-3A44-25F0-05F70B0EA33F}"/>
             </a:ext>
           </a:extLst>
@@ -9080,14 +8737,14 @@
                 <a:ea typeface="+mj-lt"/>
                 <a:cs typeface="+mj-lt"/>
               </a:rPr>
-              <a:t>(</a:t>
+              <a:t> (</a:t>
             </a:r>
             <a:r>
               <a:rPr lang="en-US" dirty="0" err="1">
                 <a:ea typeface="+mj-lt"/>
                 <a:cs typeface="+mj-lt"/>
               </a:rPr>
-              <a:t>Cenario</a:t>
+              <a:t>Cenário</a:t>
             </a:r>
             <a:r>
               <a:rPr lang="en-US" dirty="0">
@@ -9640,7 +9297,7 @@
 </p:sld>
 </file>
 
-<file path=ppt/slides/slide27.xml><?xml version="1.0" encoding="utf-8"?>
+<file path=ppt/slides/slide26.xml><?xml version="1.0" encoding="utf-8"?>
 <p:sld xmlns:a="http://schemas.openxmlformats.org/drawingml/2006/main" xmlns:r="http://schemas.openxmlformats.org/officeDocument/2006/relationships" xmlns:p="http://schemas.openxmlformats.org/presentationml/2006/main">
   <p:cSld>
     <p:spTree>
@@ -9703,14 +9360,14 @@
                 <a:ea typeface="+mj-lt"/>
                 <a:cs typeface="+mj-lt"/>
               </a:rPr>
-              <a:t>(</a:t>
+              <a:t> (</a:t>
             </a:r>
             <a:r>
               <a:rPr lang="en-US" dirty="0" err="1">
                 <a:ea typeface="+mj-lt"/>
                 <a:cs typeface="+mj-lt"/>
               </a:rPr>
-              <a:t>Cenario</a:t>
+              <a:t>Cenário</a:t>
             </a:r>
             <a:r>
               <a:rPr lang="en-US" dirty="0">
@@ -9754,7 +9411,7 @@
                 <a:ea typeface="+mn-lt"/>
                 <a:cs typeface="+mn-lt"/>
               </a:rPr>
-              <a:t>Solucoes</a:t>
+              <a:t>Soluções</a:t>
             </a:r>
           </a:p>
           <a:p>
@@ -10408,7 +10065,7 @@
 </p:sld>
 </file>
 
-<file path=ppt/slides/slide28.xml><?xml version="1.0" encoding="utf-8"?>
+<file path=ppt/slides/slide27.xml><?xml version="1.0" encoding="utf-8"?>
 <p:sld xmlns:a="http://schemas.openxmlformats.org/drawingml/2006/main" xmlns:r="http://schemas.openxmlformats.org/officeDocument/2006/relationships" xmlns:p="http://schemas.openxmlformats.org/presentationml/2006/main">
   <p:cSld>
     <p:spTree>
@@ -10861,7 +10518,7 @@
 </p:sld>
 </file>
 
-<file path=ppt/slides/slide29.xml><?xml version="1.0" encoding="utf-8"?>
+<file path=ppt/slides/slide28.xml><?xml version="1.0" encoding="utf-8"?>
 <p:sld xmlns:a="http://schemas.openxmlformats.org/drawingml/2006/main" xmlns:r="http://schemas.openxmlformats.org/officeDocument/2006/relationships" xmlns:p="http://schemas.openxmlformats.org/presentationml/2006/main">
   <p:cSld>
     <p:spTree>
@@ -11167,163 +10824,7 @@
 </p:sld>
 </file>
 
-<file path=ppt/slides/slide3.xml><?xml version="1.0" encoding="utf-8"?>
-<p:sld xmlns:a="http://schemas.openxmlformats.org/drawingml/2006/main" xmlns:r="http://schemas.openxmlformats.org/officeDocument/2006/relationships" xmlns:p="http://schemas.openxmlformats.org/presentationml/2006/main">
-  <p:cSld>
-    <p:spTree>
-      <p:nvGrpSpPr>
-        <p:cNvPr id="1" name=""/>
-        <p:cNvGrpSpPr/>
-        <p:nvPr/>
-      </p:nvGrpSpPr>
-      <p:grpSpPr>
-        <a:xfrm>
-          <a:off x="0" y="0"/>
-          <a:ext cx="0" cy="0"/>
-          <a:chOff x="0" y="0"/>
-          <a:chExt cx="0" cy="0"/>
-        </a:xfrm>
-      </p:grpSpPr>
-      <p:sp>
-        <p:nvSpPr>
-          <p:cNvPr id="2" name="Title 1">
-            <a:extLst>
-              <a:ext uri="{FF2B5EF4-FFF2-40B4-BE49-F238E27FC236}">
-                <a16:creationId xmlns:a16="http://schemas.microsoft.com/office/drawing/2014/main" id="{B065F458-B109-B85F-6F38-F402FBA99FE0}"/>
-              </a:ext>
-            </a:extLst>
-          </p:cNvPr>
-          <p:cNvSpPr>
-            <a:spLocks noGrp="1"/>
-          </p:cNvSpPr>
-          <p:nvPr>
-            <p:ph type="title"/>
-          </p:nvPr>
-        </p:nvSpPr>
-        <p:spPr/>
-        <p:txBody>
-          <a:bodyPr/>
-          <a:lstStyle/>
-          <a:p>
-            <a:r>
-              <a:rPr lang="en-US" dirty="0"/>
-              <a:t>O que e </a:t>
-            </a:r>
-            <a:r>
-              <a:rPr lang="en-US" dirty="0" err="1"/>
-              <a:t>desenvolvimento</a:t>
-            </a:r>
-            <a:r>
-              <a:rPr lang="en-US" dirty="0"/>
-              <a:t> </a:t>
-            </a:r>
-            <a:r>
-              <a:rPr lang="en-US" dirty="0" err="1"/>
-              <a:t>seguro</a:t>
-            </a:r>
-          </a:p>
-        </p:txBody>
-      </p:sp>
-      <p:sp>
-        <p:nvSpPr>
-          <p:cNvPr id="3" name="Content Placeholder 2">
-            <a:extLst>
-              <a:ext uri="{FF2B5EF4-FFF2-40B4-BE49-F238E27FC236}">
-                <a16:creationId xmlns:a16="http://schemas.microsoft.com/office/drawing/2014/main" id="{09EB3053-3AEA-011E-D6E9-04668E15965B}"/>
-              </a:ext>
-            </a:extLst>
-          </p:cNvPr>
-          <p:cNvSpPr>
-            <a:spLocks noGrp="1"/>
-          </p:cNvSpPr>
-          <p:nvPr>
-            <p:ph idx="1"/>
-          </p:nvPr>
-        </p:nvSpPr>
-        <p:spPr/>
-        <p:txBody>
-          <a:bodyPr vert="horz" lIns="91440" tIns="45720" rIns="91440" bIns="45720" rtlCol="0" anchor="t">
-            <a:normAutofit/>
-          </a:bodyPr>
-          <a:lstStyle/>
-          <a:p>
-            <a:r>
-              <a:rPr lang="en-US" dirty="0"/>
-              <a:t>E a </a:t>
-            </a:r>
-            <a:r>
-              <a:rPr lang="en-US" dirty="0" err="1"/>
-              <a:t>pratica</a:t>
-            </a:r>
-            <a:r>
-              <a:rPr lang="en-US" dirty="0"/>
-              <a:t> de </a:t>
-            </a:r>
-            <a:r>
-              <a:rPr lang="en-US" dirty="0" err="1"/>
-              <a:t>integrar</a:t>
-            </a:r>
-            <a:r>
-              <a:rPr lang="en-US" dirty="0"/>
-              <a:t> </a:t>
-            </a:r>
-            <a:r>
-              <a:rPr lang="en-US" dirty="0" err="1"/>
-              <a:t>seguranca</a:t>
-            </a:r>
-            <a:r>
-              <a:rPr lang="en-US" dirty="0"/>
-              <a:t> a </a:t>
-            </a:r>
-            <a:r>
-              <a:rPr lang="en-US" dirty="0" err="1"/>
-              <a:t>todo</a:t>
-            </a:r>
-            <a:r>
-              <a:rPr lang="en-US" dirty="0"/>
-              <a:t> </a:t>
-            </a:r>
-            <a:r>
-              <a:rPr lang="en-US" dirty="0" err="1"/>
-              <a:t>processo</a:t>
-            </a:r>
-            <a:r>
-              <a:rPr lang="en-US" dirty="0"/>
-              <a:t> de </a:t>
-            </a:r>
-            <a:r>
-              <a:rPr lang="en-US" dirty="0" err="1"/>
-              <a:t>desenvolvimento</a:t>
-            </a:r>
-            <a:r>
-              <a:rPr lang="en-US" dirty="0"/>
-              <a:t> e </a:t>
-            </a:r>
-            <a:r>
-              <a:rPr lang="en-US" dirty="0" err="1"/>
-              <a:t>manutencao</a:t>
-            </a:r>
-            <a:r>
-              <a:rPr lang="en-US" dirty="0"/>
-              <a:t> do software</a:t>
-            </a:r>
-          </a:p>
-        </p:txBody>
-      </p:sp>
-    </p:spTree>
-    <p:extLst>
-      <p:ext uri="{BB962C8B-B14F-4D97-AF65-F5344CB8AC3E}">
-        <p14:creationId xmlns:p14="http://schemas.microsoft.com/office/powerpoint/2010/main" val="1645466370"/>
-      </p:ext>
-    </p:extLst>
-  </p:cSld>
-  <p:clrMapOvr>
-    <a:masterClrMapping/>
-  </p:clrMapOvr>
-</p:sld>
-</file>
-
-<file path=ppt/slides/slide30.xml><?xml version="1.0" encoding="utf-8"?>
+<file path=ppt/slides/slide29.xml><?xml version="1.0" encoding="utf-8"?>
 <p:sld xmlns:a="http://schemas.openxmlformats.org/drawingml/2006/main" xmlns:r="http://schemas.openxmlformats.org/officeDocument/2006/relationships" xmlns:p="http://schemas.openxmlformats.org/presentationml/2006/main">
   <p:cSld>
     <p:spTree>
@@ -11430,7 +10931,108 @@
 </p:sld>
 </file>
 
-<file path=ppt/slides/slide31.xml><?xml version="1.0" encoding="utf-8"?>
+<file path=ppt/slides/slide3.xml><?xml version="1.0" encoding="utf-8"?>
+<p:sld xmlns:a="http://schemas.openxmlformats.org/drawingml/2006/main" xmlns:r="http://schemas.openxmlformats.org/officeDocument/2006/relationships" xmlns:p="http://schemas.openxmlformats.org/presentationml/2006/main">
+  <p:cSld>
+    <p:spTree>
+      <p:nvGrpSpPr>
+        <p:cNvPr id="1" name=""/>
+        <p:cNvGrpSpPr/>
+        <p:nvPr/>
+      </p:nvGrpSpPr>
+      <p:grpSpPr>
+        <a:xfrm>
+          <a:off x="0" y="0"/>
+          <a:ext cx="0" cy="0"/>
+          <a:chOff x="0" y="0"/>
+          <a:chExt cx="0" cy="0"/>
+        </a:xfrm>
+      </p:grpSpPr>
+      <p:sp>
+        <p:nvSpPr>
+          <p:cNvPr id="2" name="Title 1">
+            <a:extLst>
+              <a:ext uri="{FF2B5EF4-FFF2-40B4-BE49-F238E27FC236}">
+                <a16:creationId xmlns:a16="http://schemas.microsoft.com/office/drawing/2014/main" id="{B065F458-B109-B85F-6F38-F402FBA99FE0}"/>
+              </a:ext>
+            </a:extLst>
+          </p:cNvPr>
+          <p:cNvSpPr>
+            <a:spLocks noGrp="1"/>
+          </p:cNvSpPr>
+          <p:nvPr>
+            <p:ph type="title"/>
+          </p:nvPr>
+        </p:nvSpPr>
+        <p:spPr/>
+        <p:txBody>
+          <a:bodyPr/>
+          <a:lstStyle/>
+          <a:p>
+            <a:r>
+              <a:rPr lang="en-US" dirty="0"/>
+              <a:t>O que é </a:t>
+            </a:r>
+            <a:r>
+              <a:rPr lang="en-US" dirty="0" err="1"/>
+              <a:t>desenvolvimento</a:t>
+            </a:r>
+            <a:r>
+              <a:rPr lang="en-US" dirty="0"/>
+              <a:t> </a:t>
+            </a:r>
+            <a:r>
+              <a:rPr lang="en-US" dirty="0" err="1"/>
+              <a:t>seguro</a:t>
+            </a:r>
+            <a:endParaRPr lang="en-US" dirty="0"/>
+          </a:p>
+        </p:txBody>
+      </p:sp>
+      <p:sp>
+        <p:nvSpPr>
+          <p:cNvPr id="3" name="Content Placeholder 2">
+            <a:extLst>
+              <a:ext uri="{FF2B5EF4-FFF2-40B4-BE49-F238E27FC236}">
+                <a16:creationId xmlns:a16="http://schemas.microsoft.com/office/drawing/2014/main" id="{09EB3053-3AEA-011E-D6E9-04668E15965B}"/>
+              </a:ext>
+            </a:extLst>
+          </p:cNvPr>
+          <p:cNvSpPr>
+            <a:spLocks noGrp="1"/>
+          </p:cNvSpPr>
+          <p:nvPr>
+            <p:ph idx="1"/>
+          </p:nvPr>
+        </p:nvSpPr>
+        <p:spPr/>
+        <p:txBody>
+          <a:bodyPr vert="horz" lIns="91440" tIns="45720" rIns="91440" bIns="45720" rtlCol="0" anchor="t">
+            <a:normAutofit/>
+          </a:bodyPr>
+          <a:lstStyle/>
+          <a:p>
+            <a:r>
+              <a:rPr lang="pt-PT" dirty="0"/>
+              <a:t>E a pratica de integrar segurança a todo processo de desenvolvimento e manutenção do software</a:t>
+            </a:r>
+          </a:p>
+        </p:txBody>
+      </p:sp>
+    </p:spTree>
+    <p:extLst>
+      <p:ext uri="{BB962C8B-B14F-4D97-AF65-F5344CB8AC3E}">
+        <p14:creationId xmlns:p14="http://schemas.microsoft.com/office/powerpoint/2010/main" val="1645466370"/>
+      </p:ext>
+    </p:extLst>
+  </p:cSld>
+  <p:clrMapOvr>
+    <a:masterClrMapping/>
+  </p:clrMapOvr>
+</p:sld>
+</file>
+
+<file path=ppt/slides/slide30.xml><?xml version="1.0" encoding="utf-8"?>
 <p:sld xmlns:a="http://schemas.openxmlformats.org/drawingml/2006/main" xmlns:r="http://schemas.openxmlformats.org/officeDocument/2006/relationships" xmlns:p="http://schemas.openxmlformats.org/presentationml/2006/main">
   <p:cSld>
     <p:spTree>
@@ -11868,7 +11470,7 @@
 </p:sld>
 </file>
 
-<file path=ppt/slides/slide32.xml><?xml version="1.0" encoding="utf-8"?>
+<file path=ppt/slides/slide31.xml><?xml version="1.0" encoding="utf-8"?>
 <p:sld xmlns:a="http://schemas.openxmlformats.org/drawingml/2006/main" xmlns:r="http://schemas.openxmlformats.org/officeDocument/2006/relationships" xmlns:p="http://schemas.openxmlformats.org/presentationml/2006/main">
   <p:cSld>
     <p:spTree>
@@ -12229,7 +11831,7 @@
 </p:sld>
 </file>
 
-<file path=ppt/slides/slide33.xml><?xml version="1.0" encoding="utf-8"?>
+<file path=ppt/slides/slide32.xml><?xml version="1.0" encoding="utf-8"?>
 <p:sld xmlns:a="http://schemas.openxmlformats.org/drawingml/2006/main" xmlns:r="http://schemas.openxmlformats.org/officeDocument/2006/relationships" xmlns:p="http://schemas.openxmlformats.org/presentationml/2006/main">
   <p:cSld>
     <p:spTree>
@@ -12953,7 +12555,7 @@
 </p:sld>
 </file>
 
-<file path=ppt/slides/slide34.xml><?xml version="1.0" encoding="utf-8"?>
+<file path=ppt/slides/slide33.xml><?xml version="1.0" encoding="utf-8"?>
 <p:sld xmlns:a="http://schemas.openxmlformats.org/drawingml/2006/main" xmlns:r="http://schemas.openxmlformats.org/officeDocument/2006/relationships" xmlns:p="http://schemas.openxmlformats.org/presentationml/2006/main">
   <p:cSld>
     <p:spTree>
@@ -13350,7 +12952,7 @@
 </p:sld>
 </file>
 
-<file path=ppt/slides/slide35.xml><?xml version="1.0" encoding="utf-8"?>
+<file path=ppt/slides/slide34.xml><?xml version="1.0" encoding="utf-8"?>
 <p:sld xmlns:a="http://schemas.openxmlformats.org/drawingml/2006/main" xmlns:r="http://schemas.openxmlformats.org/officeDocument/2006/relationships" xmlns:p="http://schemas.openxmlformats.org/presentationml/2006/main">
   <p:cSld>
     <p:spTree>
@@ -13897,7 +13499,7 @@
 </p:sld>
 </file>
 
-<file path=ppt/slides/slide36.xml><?xml version="1.0" encoding="utf-8"?>
+<file path=ppt/slides/slide35.xml><?xml version="1.0" encoding="utf-8"?>
 <p:sld xmlns:a="http://schemas.openxmlformats.org/drawingml/2006/main" xmlns:r="http://schemas.openxmlformats.org/officeDocument/2006/relationships" xmlns:p="http://schemas.openxmlformats.org/presentationml/2006/main">
   <p:cSld>
     <p:spTree>
@@ -14612,7 +14214,7 @@
 </p:sld>
 </file>
 
-<file path=ppt/slides/slide37.xml><?xml version="1.0" encoding="utf-8"?>
+<file path=ppt/slides/slide36.xml><?xml version="1.0" encoding="utf-8"?>
 <p:sld xmlns:a="http://schemas.openxmlformats.org/drawingml/2006/main" xmlns:r="http://schemas.openxmlformats.org/officeDocument/2006/relationships" xmlns:p="http://schemas.openxmlformats.org/presentationml/2006/main">
   <p:cSld>
     <p:spTree>
@@ -15030,7 +14632,7 @@
 </p:sld>
 </file>
 
-<file path=ppt/slides/slide38.xml><?xml version="1.0" encoding="utf-8"?>
+<file path=ppt/slides/slide37.xml><?xml version="1.0" encoding="utf-8"?>
 <p:sld xmlns:a="http://schemas.openxmlformats.org/drawingml/2006/main" xmlns:r="http://schemas.openxmlformats.org/officeDocument/2006/relationships" xmlns:p="http://schemas.openxmlformats.org/presentationml/2006/main">
   <p:cSld>
     <p:spTree>
@@ -15130,7 +14732,7 @@
 </p:sld>
 </file>
 
-<file path=ppt/slides/slide39.xml><?xml version="1.0" encoding="utf-8"?>
+<file path=ppt/slides/slide38.xml><?xml version="1.0" encoding="utf-8"?>
 <p:sld xmlns:a="http://schemas.openxmlformats.org/drawingml/2006/main" xmlns:r="http://schemas.openxmlformats.org/officeDocument/2006/relationships" xmlns:p="http://schemas.openxmlformats.org/presentationml/2006/main">
   <p:cSld>
     <p:spTree>
@@ -15230,6 +14832,212 @@
 </p:sld>
 </file>
 
+<file path=ppt/slides/slide39.xml><?xml version="1.0" encoding="utf-8"?>
+<p:sld xmlns:a="http://schemas.openxmlformats.org/drawingml/2006/main" xmlns:r="http://schemas.openxmlformats.org/officeDocument/2006/relationships" xmlns:p="http://schemas.openxmlformats.org/presentationml/2006/main">
+  <p:cSld>
+    <p:spTree>
+      <p:nvGrpSpPr>
+        <p:cNvPr id="1" name=""/>
+        <p:cNvGrpSpPr/>
+        <p:nvPr/>
+      </p:nvGrpSpPr>
+      <p:grpSpPr>
+        <a:xfrm>
+          <a:off x="0" y="0"/>
+          <a:ext cx="0" cy="0"/>
+          <a:chOff x="0" y="0"/>
+          <a:chExt cx="0" cy="0"/>
+        </a:xfrm>
+      </p:grpSpPr>
+      <p:sp>
+        <p:nvSpPr>
+          <p:cNvPr id="2" name="Title 1">
+            <a:extLst>
+              <a:ext uri="{FF2B5EF4-FFF2-40B4-BE49-F238E27FC236}">
+                <a16:creationId xmlns:a16="http://schemas.microsoft.com/office/drawing/2014/main" id="{AA16704E-7593-13AE-28C1-B19948796FD7}"/>
+              </a:ext>
+            </a:extLst>
+          </p:cNvPr>
+          <p:cNvSpPr>
+            <a:spLocks noGrp="1"/>
+          </p:cNvSpPr>
+          <p:nvPr>
+            <p:ph type="title"/>
+          </p:nvPr>
+        </p:nvSpPr>
+        <p:spPr/>
+        <p:txBody>
+          <a:bodyPr/>
+          <a:lstStyle/>
+          <a:p>
+            <a:r>
+              <a:rPr lang="en-US" dirty="0"/>
+              <a:t>Hands –On</a:t>
+            </a:r>
+          </a:p>
+        </p:txBody>
+      </p:sp>
+      <p:sp>
+        <p:nvSpPr>
+          <p:cNvPr id="3" name="Content Placeholder 2">
+            <a:extLst>
+              <a:ext uri="{FF2B5EF4-FFF2-40B4-BE49-F238E27FC236}">
+                <a16:creationId xmlns:a16="http://schemas.microsoft.com/office/drawing/2014/main" id="{7E3E428B-FCFC-794A-8534-56C3DAE7BDAB}"/>
+              </a:ext>
+            </a:extLst>
+          </p:cNvPr>
+          <p:cNvSpPr>
+            <a:spLocks noGrp="1"/>
+          </p:cNvSpPr>
+          <p:nvPr>
+            <p:ph idx="1"/>
+          </p:nvPr>
+        </p:nvSpPr>
+        <p:spPr/>
+        <p:txBody>
+          <a:bodyPr vert="horz" lIns="91440" tIns="45720" rIns="91440" bIns="45720" rtlCol="0" anchor="t">
+            <a:normAutofit/>
+          </a:bodyPr>
+          <a:lstStyle/>
+          <a:p>
+            <a:r>
+              <a:rPr lang="en-US" dirty="0" err="1"/>
+              <a:t>Daqui</a:t>
+            </a:r>
+            <a:r>
+              <a:rPr lang="en-US" dirty="0"/>
+              <a:t> </a:t>
+            </a:r>
+            <a:r>
+              <a:rPr lang="en-US" dirty="0" err="1"/>
+              <a:t>poderia</a:t>
+            </a:r>
+            <a:r>
+              <a:rPr lang="en-US" dirty="0"/>
+              <a:t> </a:t>
+            </a:r>
+            <a:r>
+              <a:rPr lang="en-US" dirty="0" err="1"/>
+              <a:t>ter</a:t>
+            </a:r>
+            <a:r>
+              <a:rPr lang="en-US" dirty="0"/>
+              <a:t> </a:t>
+            </a:r>
+            <a:r>
+              <a:rPr lang="en-US" dirty="0" err="1"/>
+              <a:t>uma</a:t>
+            </a:r>
+            <a:r>
+              <a:rPr lang="en-US" dirty="0"/>
+              <a:t> </a:t>
+            </a:r>
+            <a:r>
+              <a:rPr lang="en-US" dirty="0" err="1"/>
+              <a:t>parte</a:t>
+            </a:r>
+            <a:r>
+              <a:rPr lang="en-US" dirty="0"/>
+              <a:t> </a:t>
+            </a:r>
+            <a:r>
+              <a:rPr lang="en-US" dirty="0" err="1"/>
+              <a:t>pratica</a:t>
+            </a:r>
+            <a:r>
+              <a:rPr lang="en-US" dirty="0"/>
+              <a:t> </a:t>
+            </a:r>
+            <a:r>
+              <a:rPr lang="en-US" dirty="0" err="1"/>
+              <a:t>utilizando</a:t>
+            </a:r>
+            <a:r>
+              <a:rPr lang="en-US" dirty="0"/>
+              <a:t> um software </a:t>
+            </a:r>
+            <a:r>
+              <a:rPr lang="en-US" dirty="0" err="1"/>
+              <a:t>vulneravel</a:t>
+            </a:r>
+            <a:r>
+              <a:rPr lang="en-US" dirty="0"/>
+              <a:t> </a:t>
+            </a:r>
+            <a:r>
+              <a:rPr lang="en-US" dirty="0" err="1"/>
+              <a:t>por</a:t>
+            </a:r>
+            <a:r>
+              <a:rPr lang="en-US" dirty="0"/>
+              <a:t> </a:t>
+            </a:r>
+            <a:r>
+              <a:rPr lang="en-US" dirty="0" err="1"/>
+              <a:t>padrao</a:t>
+            </a:r>
+            <a:r>
+              <a:rPr lang="en-US" dirty="0"/>
+              <a:t> para fins de </a:t>
+            </a:r>
+            <a:r>
+              <a:rPr lang="en-US" dirty="0" err="1"/>
+              <a:t>aprendizagem</a:t>
+            </a:r>
+            <a:r>
+              <a:rPr lang="en-US" dirty="0"/>
+              <a:t> </a:t>
+            </a:r>
+            <a:r>
+              <a:rPr lang="en-US" dirty="0" err="1"/>
+              <a:t>como</a:t>
+            </a:r>
+            <a:r>
+              <a:rPr lang="en-US" dirty="0"/>
+              <a:t> </a:t>
+            </a:r>
+            <a:r>
+              <a:rPr lang="en-US" dirty="0" err="1"/>
+              <a:t>JuiceShop</a:t>
+            </a:r>
+            <a:r>
+              <a:rPr lang="en-US" dirty="0"/>
+              <a:t> (OWASP), </a:t>
+            </a:r>
+            <a:r>
+              <a:rPr lang="en-US" dirty="0" err="1"/>
+              <a:t>ou</a:t>
+            </a:r>
+            <a:r>
+              <a:rPr lang="en-US" dirty="0"/>
+              <a:t> DVWA</a:t>
+            </a:r>
+          </a:p>
+          <a:p>
+            <a:r>
+              <a:rPr lang="en-US" dirty="0">
+                <a:ea typeface="+mn-lt"/>
+                <a:cs typeface="+mn-lt"/>
+              </a:rPr>
+              <a:t>https://pwning.owasp-juice.shop/companion-guide/latest/part4/trainers.html</a:t>
+            </a:r>
+            <a:endParaRPr lang="en-US" dirty="0"/>
+          </a:p>
+        </p:txBody>
+      </p:sp>
+    </p:spTree>
+    <p:extLst>
+      <p:ext uri="{BB962C8B-B14F-4D97-AF65-F5344CB8AC3E}">
+        <p14:creationId xmlns:p14="http://schemas.microsoft.com/office/powerpoint/2010/main" val="323269206"/>
+      </p:ext>
+    </p:extLst>
+  </p:cSld>
+  <p:clrMapOvr>
+    <a:masterClrMapping/>
+  </p:clrMapOvr>
+</p:sld>
+</file>
+
 <file path=ppt/slides/slide4.xml><?xml version="1.0" encoding="utf-8"?>
 <p:sld xmlns:a="http://schemas.openxmlformats.org/drawingml/2006/main" xmlns:r="http://schemas.openxmlformats.org/officeDocument/2006/relationships" xmlns:p="http://schemas.openxmlformats.org/presentationml/2006/main">
   <p:cSld>
@@ -15269,8 +15077,8 @@
           <a:lstStyle/>
           <a:p>
             <a:r>
-              <a:rPr lang="en-US" dirty="0" err="1"/>
-              <a:t>Importancia</a:t>
+              <a:rPr lang="pt-PT" dirty="0"/>
+              <a:t>Importância</a:t>
             </a:r>
             <a:r>
               <a:rPr lang="en-US" dirty="0"/>
@@ -15288,6 +15096,7 @@
               <a:rPr lang="en-US" dirty="0" err="1"/>
               <a:t>seguro</a:t>
             </a:r>
+            <a:endParaRPr lang="en-US" dirty="0"/>
           </a:p>
         </p:txBody>
       </p:sp>
@@ -15562,212 +15371,6 @@
     <p:extLst>
       <p:ext uri="{BB962C8B-B14F-4D97-AF65-F5344CB8AC3E}">
         <p14:creationId xmlns:p14="http://schemas.microsoft.com/office/powerpoint/2010/main" val="4136124336"/>
-      </p:ext>
-    </p:extLst>
-  </p:cSld>
-  <p:clrMapOvr>
-    <a:masterClrMapping/>
-  </p:clrMapOvr>
-</p:sld>
-</file>
-
-<file path=ppt/slides/slide40.xml><?xml version="1.0" encoding="utf-8"?>
-<p:sld xmlns:a="http://schemas.openxmlformats.org/drawingml/2006/main" xmlns:r="http://schemas.openxmlformats.org/officeDocument/2006/relationships" xmlns:p="http://schemas.openxmlformats.org/presentationml/2006/main">
-  <p:cSld>
-    <p:spTree>
-      <p:nvGrpSpPr>
-        <p:cNvPr id="1" name=""/>
-        <p:cNvGrpSpPr/>
-        <p:nvPr/>
-      </p:nvGrpSpPr>
-      <p:grpSpPr>
-        <a:xfrm>
-          <a:off x="0" y="0"/>
-          <a:ext cx="0" cy="0"/>
-          <a:chOff x="0" y="0"/>
-          <a:chExt cx="0" cy="0"/>
-        </a:xfrm>
-      </p:grpSpPr>
-      <p:sp>
-        <p:nvSpPr>
-          <p:cNvPr id="2" name="Title 1">
-            <a:extLst>
-              <a:ext uri="{FF2B5EF4-FFF2-40B4-BE49-F238E27FC236}">
-                <a16:creationId xmlns:a16="http://schemas.microsoft.com/office/drawing/2014/main" id="{AA16704E-7593-13AE-28C1-B19948796FD7}"/>
-              </a:ext>
-            </a:extLst>
-          </p:cNvPr>
-          <p:cNvSpPr>
-            <a:spLocks noGrp="1"/>
-          </p:cNvSpPr>
-          <p:nvPr>
-            <p:ph type="title"/>
-          </p:nvPr>
-        </p:nvSpPr>
-        <p:spPr/>
-        <p:txBody>
-          <a:bodyPr/>
-          <a:lstStyle/>
-          <a:p>
-            <a:r>
-              <a:rPr lang="en-US" dirty="0"/>
-              <a:t>Hands –On</a:t>
-            </a:r>
-          </a:p>
-        </p:txBody>
-      </p:sp>
-      <p:sp>
-        <p:nvSpPr>
-          <p:cNvPr id="3" name="Content Placeholder 2">
-            <a:extLst>
-              <a:ext uri="{FF2B5EF4-FFF2-40B4-BE49-F238E27FC236}">
-                <a16:creationId xmlns:a16="http://schemas.microsoft.com/office/drawing/2014/main" id="{7E3E428B-FCFC-794A-8534-56C3DAE7BDAB}"/>
-              </a:ext>
-            </a:extLst>
-          </p:cNvPr>
-          <p:cNvSpPr>
-            <a:spLocks noGrp="1"/>
-          </p:cNvSpPr>
-          <p:nvPr>
-            <p:ph idx="1"/>
-          </p:nvPr>
-        </p:nvSpPr>
-        <p:spPr/>
-        <p:txBody>
-          <a:bodyPr vert="horz" lIns="91440" tIns="45720" rIns="91440" bIns="45720" rtlCol="0" anchor="t">
-            <a:normAutofit/>
-          </a:bodyPr>
-          <a:lstStyle/>
-          <a:p>
-            <a:r>
-              <a:rPr lang="en-US" dirty="0" err="1"/>
-              <a:t>Daqui</a:t>
-            </a:r>
-            <a:r>
-              <a:rPr lang="en-US" dirty="0"/>
-              <a:t> </a:t>
-            </a:r>
-            <a:r>
-              <a:rPr lang="en-US" dirty="0" err="1"/>
-              <a:t>poderia</a:t>
-            </a:r>
-            <a:r>
-              <a:rPr lang="en-US" dirty="0"/>
-              <a:t> </a:t>
-            </a:r>
-            <a:r>
-              <a:rPr lang="en-US" dirty="0" err="1"/>
-              <a:t>ter</a:t>
-            </a:r>
-            <a:r>
-              <a:rPr lang="en-US" dirty="0"/>
-              <a:t> </a:t>
-            </a:r>
-            <a:r>
-              <a:rPr lang="en-US" dirty="0" err="1"/>
-              <a:t>uma</a:t>
-            </a:r>
-            <a:r>
-              <a:rPr lang="en-US" dirty="0"/>
-              <a:t> </a:t>
-            </a:r>
-            <a:r>
-              <a:rPr lang="en-US" dirty="0" err="1"/>
-              <a:t>parte</a:t>
-            </a:r>
-            <a:r>
-              <a:rPr lang="en-US" dirty="0"/>
-              <a:t> </a:t>
-            </a:r>
-            <a:r>
-              <a:rPr lang="en-US" dirty="0" err="1"/>
-              <a:t>pratica</a:t>
-            </a:r>
-            <a:r>
-              <a:rPr lang="en-US" dirty="0"/>
-              <a:t> </a:t>
-            </a:r>
-            <a:r>
-              <a:rPr lang="en-US" dirty="0" err="1"/>
-              <a:t>utilizando</a:t>
-            </a:r>
-            <a:r>
-              <a:rPr lang="en-US" dirty="0"/>
-              <a:t> um software </a:t>
-            </a:r>
-            <a:r>
-              <a:rPr lang="en-US" dirty="0" err="1"/>
-              <a:t>vulneravel</a:t>
-            </a:r>
-            <a:r>
-              <a:rPr lang="en-US" dirty="0"/>
-              <a:t> </a:t>
-            </a:r>
-            <a:r>
-              <a:rPr lang="en-US" dirty="0" err="1"/>
-              <a:t>por</a:t>
-            </a:r>
-            <a:r>
-              <a:rPr lang="en-US" dirty="0"/>
-              <a:t> </a:t>
-            </a:r>
-            <a:r>
-              <a:rPr lang="en-US" dirty="0" err="1"/>
-              <a:t>padrao</a:t>
-            </a:r>
-            <a:r>
-              <a:rPr lang="en-US" dirty="0"/>
-              <a:t> para fins de </a:t>
-            </a:r>
-            <a:r>
-              <a:rPr lang="en-US" dirty="0" err="1"/>
-              <a:t>aprendizagem</a:t>
-            </a:r>
-            <a:r>
-              <a:rPr lang="en-US" dirty="0"/>
-              <a:t> </a:t>
-            </a:r>
-            <a:r>
-              <a:rPr lang="en-US" dirty="0" err="1"/>
-              <a:t>como</a:t>
-            </a:r>
-            <a:r>
-              <a:rPr lang="en-US" dirty="0"/>
-              <a:t> </a:t>
-            </a:r>
-            <a:r>
-              <a:rPr lang="en-US" dirty="0" err="1"/>
-              <a:t>JuiceShop</a:t>
-            </a:r>
-            <a:r>
-              <a:rPr lang="en-US" dirty="0"/>
-              <a:t> (OWASP), </a:t>
-            </a:r>
-            <a:r>
-              <a:rPr lang="en-US" dirty="0" err="1"/>
-              <a:t>ou</a:t>
-            </a:r>
-            <a:r>
-              <a:rPr lang="en-US" dirty="0"/>
-              <a:t> DVWA</a:t>
-            </a:r>
-          </a:p>
-          <a:p>
-            <a:r>
-              <a:rPr lang="en-US" dirty="0">
-                <a:ea typeface="+mn-lt"/>
-                <a:cs typeface="+mn-lt"/>
-              </a:rPr>
-              <a:t>https://pwning.owasp-juice.shop/companion-guide/latest/part4/trainers.html</a:t>
-            </a:r>
-            <a:endParaRPr lang="en-US" dirty="0"/>
-          </a:p>
-        </p:txBody>
-      </p:sp>
-    </p:spTree>
-    <p:extLst>
-      <p:ext uri="{BB962C8B-B14F-4D97-AF65-F5344CB8AC3E}">
-        <p14:creationId xmlns:p14="http://schemas.microsoft.com/office/powerpoint/2010/main" val="323269206"/>
       </p:ext>
     </p:extLst>
   </p:cSld>
@@ -15816,8 +15419,12 @@
           <a:lstStyle/>
           <a:p>
             <a:r>
+              <a:rPr lang="en-US" dirty="0" err="1"/>
+              <a:t>Princípios</a:t>
+            </a:r>
+            <a:r>
               <a:rPr lang="en-US" dirty="0"/>
-              <a:t>Principios do </a:t>
+              <a:t> do </a:t>
             </a:r>
             <a:r>
               <a:rPr lang="en-US" dirty="0" err="1"/>
@@ -15831,6 +15438,7 @@
               <a:rPr lang="en-US" dirty="0" err="1"/>
               <a:t>seguro</a:t>
             </a:r>
+            <a:endParaRPr lang="en-US" dirty="0"/>
           </a:p>
         </p:txBody>
       </p:sp>
@@ -16396,7 +16004,7 @@
           <a:lstStyle/>
           <a:p>
             <a:r>
-              <a:rPr lang="en-US" err="1"/>
+              <a:rPr lang="en-US" dirty="0" err="1"/>
               <a:t>Projeto</a:t>
             </a:r>
             <a:r>
@@ -16404,7 +16012,7 @@
               <a:t> que </a:t>
             </a:r>
             <a:r>
-              <a:rPr lang="en-US" err="1"/>
+              <a:rPr lang="en-US" dirty="0" err="1"/>
               <a:t>periodicamente</a:t>
             </a:r>
             <a:r>
@@ -16412,7 +16020,7 @@
               <a:t> </a:t>
             </a:r>
             <a:r>
-              <a:rPr lang="en-US" err="1"/>
+              <a:rPr lang="en-US" dirty="0" err="1"/>
               <a:t>lista</a:t>
             </a:r>
             <a:r>
@@ -16420,7 +16028,7 @@
               <a:t> as 10 </a:t>
             </a:r>
             <a:r>
-              <a:rPr lang="en-US" err="1"/>
+              <a:rPr lang="en-US" dirty="0" err="1"/>
               <a:t>categorias</a:t>
             </a:r>
             <a:r>
@@ -16428,7 +16036,7 @@
               <a:t> de </a:t>
             </a:r>
             <a:r>
-              <a:rPr lang="en-US" err="1"/>
+              <a:rPr lang="en-US" dirty="0" err="1"/>
               <a:t>vulnerabilidades</a:t>
             </a:r>
             <a:r>
@@ -16436,7 +16044,7 @@
               <a:t> com </a:t>
             </a:r>
             <a:r>
-              <a:rPr lang="en-US" err="1"/>
+              <a:rPr lang="en-US" dirty="0" err="1"/>
               <a:t>risco</a:t>
             </a:r>
             <a:r>
@@ -16444,7 +16052,7 @@
               <a:t> </a:t>
             </a:r>
             <a:r>
-              <a:rPr lang="en-US" err="1"/>
+              <a:rPr lang="en-US" dirty="0" err="1"/>
               <a:t>mais</a:t>
             </a:r>
             <a:r>
@@ -16452,8 +16060,8 @@
               <a:t> </a:t>
             </a:r>
             <a:r>
-              <a:rPr lang="en-US" err="1"/>
-              <a:t>critico</a:t>
+              <a:rPr lang="en-US" dirty="0" err="1"/>
+              <a:t>crítico</a:t>
             </a:r>
             <a:r>
               <a:rPr lang="en-US" dirty="0"/>
@@ -16478,8 +16086,8 @@
               <a:t> </a:t>
             </a:r>
             <a:r>
-              <a:rPr lang="en-US" dirty="0" err="1"/>
-              <a:t>estrategias</a:t>
+              <a:rPr lang="pt-PT" dirty="0"/>
+              <a:t>estratégias</a:t>
             </a:r>
             <a:r>
               <a:rPr lang="en-US" dirty="0"/>
@@ -16487,7 +16095,7 @@
             </a:r>
             <a:r>
               <a:rPr lang="en-US" dirty="0" err="1"/>
-              <a:t>seguranca</a:t>
+              <a:t>segurança</a:t>
             </a:r>
             <a:r>
               <a:rPr lang="en-US" dirty="0"/>
@@ -16511,7 +16119,7 @@
             </a:r>
             <a:r>
               <a:rPr lang="en-US" dirty="0" err="1"/>
-              <a:t>vulnerbilidades</a:t>
+              <a:t>vulnerabilidades</a:t>
             </a:r>
             <a:r>
               <a:rPr lang="en-US" dirty="0"/>
@@ -16523,23 +16131,15 @@
             </a:r>
             <a:r>
               <a:rPr lang="en-US" dirty="0"/>
-              <a:t> </a:t>
-            </a:r>
+              <a:t> software</a:t>
+            </a:r>
+          </a:p>
+          <a:p>
             <a:r>
               <a:rPr lang="en-US" dirty="0" err="1"/>
-              <a:t>softwares</a:t>
+              <a:t>Não-exaustivo</a:t>
             </a:r>
             <a:endParaRPr lang="en-US" dirty="0"/>
-          </a:p>
-          <a:p>
-            <a:r>
-              <a:rPr lang="en-US" dirty="0"/>
-              <a:t>Nao-</a:t>
-            </a:r>
-            <a:r>
-              <a:rPr lang="en-US" dirty="0" err="1"/>
-              <a:t>exaustivo</a:t>
-            </a:r>
           </a:p>
         </p:txBody>
       </p:sp>
